--- a/out/slides/DREIF_portfolio.pptx
+++ b/out/slides/DREIF_portfolio.pptx
@@ -3253,12 +3253,12 @@
         </p:nvSpPr>
         <p:spPr>
           <a:xfrm>
-            <a:off x="685783" y="2648712"/>
-            <a:ext cx="5324342" cy="1817370"/>
+            <a:off x="685783" y="2553462"/>
+            <a:ext cx="5352916" cy="1834896"/>
           </a:xfrm>
           <a:prstGeom prst="roundRect">
             <a:avLst>
-              <a:gd name="adj" fmla="val 5241"/>
+              <a:gd name="adj" fmla="val 5191"/>
             </a:avLst>
           </a:prstGeom>
           <a:solidFill>
@@ -3298,8 +3298,8 @@
         </p:nvSpPr>
         <p:spPr>
           <a:xfrm>
-            <a:off x="876278" y="2801112"/>
-            <a:ext cx="4943351" cy="205740"/>
+            <a:off x="857229" y="2677287"/>
+            <a:ext cx="5010025" cy="205740"/>
           </a:xfrm>
           <a:prstGeom prst="rect">
             <a:avLst/>
@@ -3339,7 +3339,7 @@
                 </a:solidFill>
                 <a:latin typeface="Arial"/>
               </a:rPr>
-              <a:t>· руководитель</a:t>
+              <a:t>· руководитель, инженерия</a:t>
             </a:r>
           </a:p>
         </p:txBody>
@@ -3352,8 +3352,8 @@
         </p:nvSpPr>
         <p:spPr>
           <a:xfrm>
-            <a:off x="876278" y="3073527"/>
-            <a:ext cx="4943351" cy="1240155"/>
+            <a:off x="857229" y="2949702"/>
+            <a:ext cx="5010025" cy="1314831"/>
           </a:xfrm>
           <a:prstGeom prst="rect">
             <a:avLst/>
@@ -3368,7 +3368,7 @@
           <a:p>
             <a:pPr>
               <a:lnSpc>
-                <a:spcPts val="1627"/>
+                <a:spcPts val="1479"/>
               </a:lnSpc>
               <a:spcBef>
                 <a:spcPts val="0"/>
@@ -3378,13 +3378,13 @@
               </a:spcAft>
             </a:pPr>
             <a:r>
-              <a:rPr sz="1162" b="0" lang="ru-RU" spc="0">
+              <a:rPr sz="1087" b="0" lang="ru-RU" spc="0">
                 <a:solidFill>
                   <a:srgbClr val="14171C"/>
                 </a:solidFill>
                 <a:latin typeface="Arial"/>
               </a:rPr>
-              <a:t>Автор FRS — системы контроля доступа по лицу. С ней: победитель Весенней научной сессии СНО НИЯУ МИФИ 2026, призёр XI конференции «Инженеры будущего», почётный диплом международного конкурса «Учёные будущего» (больше 1000 заявок). Призёр Московской предпрофессиональной олимпиады по ИТ, 2-е место команды на ЛШАД ФКН ВШЭ (трек МТС).</a:t>
+              <a:t>Автор FRS — системы контроля доступа по лицу. С ней: победитель Весенней научной сессии СНО НИЯУ МИФИ 2026, призёр XI конференции «Инженеры будущего», почётный диплом конкурса «Учёные будущего» (секция «Программирование»), тезисы в сборнике МИФИ (РИНЦ). Призёр Московской предпрофессиональной олимпиады (информационные технологии) и открытого конкурса Яндекс Лицея, 2-е место команды на ЛШАД ФКН ВШЭ (трек МТС, продвинутая группа).</a:t>
             </a:r>
           </a:p>
         </p:txBody>
@@ -3397,12 +3397,12 @@
         </p:nvSpPr>
         <p:spPr>
           <a:xfrm>
-            <a:off x="6181570" y="2648712"/>
-            <a:ext cx="5324342" cy="1817370"/>
+            <a:off x="6152996" y="2553462"/>
+            <a:ext cx="5352916" cy="1834896"/>
           </a:xfrm>
           <a:prstGeom prst="roundRect">
             <a:avLst>
-              <a:gd name="adj" fmla="val 5241"/>
+              <a:gd name="adj" fmla="val 5191"/>
             </a:avLst>
           </a:prstGeom>
           <a:solidFill>
@@ -3442,8 +3442,8 @@
         </p:nvSpPr>
         <p:spPr>
           <a:xfrm>
-            <a:off x="6372066" y="2801112"/>
-            <a:ext cx="4943351" cy="205740"/>
+            <a:off x="6324442" y="2677287"/>
+            <a:ext cx="5010025" cy="205740"/>
           </a:xfrm>
           <a:prstGeom prst="rect">
             <a:avLst/>
@@ -3496,8 +3496,8 @@
         </p:nvSpPr>
         <p:spPr>
           <a:xfrm>
-            <a:off x="6372066" y="3073527"/>
-            <a:ext cx="4943351" cy="1240155"/>
+            <a:off x="6324442" y="2949702"/>
+            <a:ext cx="5010025" cy="1126998"/>
           </a:xfrm>
           <a:prstGeom prst="rect">
             <a:avLst/>
@@ -3512,7 +3512,7 @@
           <a:p>
             <a:pPr>
               <a:lnSpc>
-                <a:spcPts val="1627"/>
+                <a:spcPts val="1479"/>
               </a:lnSpc>
               <a:spcBef>
                 <a:spcPts val="0"/>
@@ -3522,7 +3522,7 @@
               </a:spcAft>
             </a:pPr>
             <a:r>
-              <a:rPr sz="1162" b="0" lang="ru-RU" spc="0">
+              <a:rPr sz="1087" b="0" lang="ru-RU" spc="0">
                 <a:solidFill>
                   <a:srgbClr val="14171C"/>
                 </a:solidFill>
@@ -3541,12 +3541,12 @@
         </p:nvSpPr>
         <p:spPr>
           <a:xfrm>
-            <a:off x="685783" y="4637532"/>
-            <a:ext cx="5324342" cy="1610677"/>
+            <a:off x="685783" y="4502658"/>
+            <a:ext cx="5352916" cy="1459230"/>
           </a:xfrm>
           <a:prstGeom prst="roundRect">
             <a:avLst>
-              <a:gd name="adj" fmla="val 5913"/>
+              <a:gd name="adj" fmla="val 6527"/>
             </a:avLst>
           </a:prstGeom>
           <a:solidFill>
@@ -3586,8 +3586,8 @@
         </p:nvSpPr>
         <p:spPr>
           <a:xfrm>
-            <a:off x="876278" y="4789932"/>
-            <a:ext cx="4943351" cy="205740"/>
+            <a:off x="857229" y="4626483"/>
+            <a:ext cx="5010025" cy="205740"/>
           </a:xfrm>
           <a:prstGeom prst="rect">
             <a:avLst/>
@@ -3640,8 +3640,8 @@
         </p:nvSpPr>
         <p:spPr>
           <a:xfrm>
-            <a:off x="876278" y="5062347"/>
-            <a:ext cx="4943351" cy="1033462"/>
+            <a:off x="857229" y="4898898"/>
+            <a:ext cx="5010025" cy="939165"/>
           </a:xfrm>
           <a:prstGeom prst="rect">
             <a:avLst/>
@@ -3656,7 +3656,7 @@
           <a:p>
             <a:pPr>
               <a:lnSpc>
-                <a:spcPts val="1627"/>
+                <a:spcPts val="1479"/>
               </a:lnSpc>
               <a:spcBef>
                 <a:spcPts val="0"/>
@@ -3666,13 +3666,13 @@
               </a:spcAft>
             </a:pPr>
             <a:r>
-              <a:rPr sz="1162" b="0" lang="ru-RU" spc="0">
+              <a:rPr sz="1087" b="0" lang="ru-RU" spc="0">
                 <a:solidFill>
                   <a:srgbClr val="14171C"/>
                 </a:solidFill>
                 <a:latin typeface="Arial"/>
               </a:rPr>
-              <a:t>Победитель олимпиады ВШЭ «Высшая проба» по промышленной разработке (бэкенд) и Московской предпрофессиональной олимпиады (инженерия). Финалист ДАНО (анализ данных) и «Ключа» (бизнес). 2-е место команды на ЛШАД ФКН ВШЭ (трек МТС). Полгода ML-разработчиком в компании.</a:t>
+              <a:t>Победитель олимпиады ВШЭ «Высшая проба» по промышленной разработке (бэкенд) и Московской предпрофессиональной олимпиады (инженерия). Финалист ДАНО (анализ данных) и бизнес-чемпионата «Ключ» («Высшая проба»). 2-е место команды на ЛШАД ФКН ВШЭ (трек МТС, продвинутая группа). Полгода ML-разработчиком в компании.</a:t>
             </a:r>
           </a:p>
         </p:txBody>
@@ -3685,12 +3685,12 @@
         </p:nvSpPr>
         <p:spPr>
           <a:xfrm>
-            <a:off x="6181570" y="4637532"/>
-            <a:ext cx="5324342" cy="1610677"/>
+            <a:off x="6152996" y="4502658"/>
+            <a:ext cx="5352916" cy="1459230"/>
           </a:xfrm>
           <a:prstGeom prst="roundRect">
             <a:avLst>
-              <a:gd name="adj" fmla="val 5913"/>
+              <a:gd name="adj" fmla="val 6527"/>
             </a:avLst>
           </a:prstGeom>
           <a:solidFill>
@@ -3730,8 +3730,8 @@
         </p:nvSpPr>
         <p:spPr>
           <a:xfrm>
-            <a:off x="6372066" y="4789932"/>
-            <a:ext cx="4943351" cy="205740"/>
+            <a:off x="6324442" y="4626483"/>
+            <a:ext cx="5010025" cy="205740"/>
           </a:xfrm>
           <a:prstGeom prst="rect">
             <a:avLst/>
@@ -3784,8 +3784,8 @@
         </p:nvSpPr>
         <p:spPr>
           <a:xfrm>
-            <a:off x="6372066" y="5062347"/>
-            <a:ext cx="4943351" cy="826770"/>
+            <a:off x="6324442" y="4898898"/>
+            <a:ext cx="5010025" cy="751332"/>
           </a:xfrm>
           <a:prstGeom prst="rect">
             <a:avLst/>
@@ -3800,7 +3800,7 @@
           <a:p>
             <a:pPr>
               <a:lnSpc>
-                <a:spcPts val="1627"/>
+                <a:spcPts val="1479"/>
               </a:lnSpc>
               <a:spcBef>
                 <a:spcPts val="0"/>
@@ -3810,7 +3810,7 @@
               </a:spcAft>
             </a:pPr>
             <a:r>
-              <a:rPr sz="1162" b="0" lang="ru-RU" spc="0">
+              <a:rPr sz="1087" b="0" lang="ru-RU" spc="0">
                 <a:solidFill>
                   <a:srgbClr val="14171C"/>
                 </a:solidFill>
@@ -4065,7 +4065,7 @@
                 </a:solidFill>
                 <a:latin typeface="Arial"/>
               </a:rPr>
-              <a:t>С тягой 55 мН клиент платит за срочность ксеноном:</a:t>
+              <a:t>С тягой 55 мН срочность оплачивается ксеноном:</a:t>
             </a:r>
             <a:br/>
             <a:r>
@@ -4075,7 +4075,7 @@
                 </a:solidFill>
                 <a:latin typeface="Arial"/>
               </a:rPr>
-              <a:t>90 суток вместо 180 стоят в 2,4 раза больше</a:t>
+              <a:t>90 суток вместо 180 требуют его в 2,4 раза больше</a:t>
             </a:r>
           </a:p>
         </p:txBody>
@@ -5589,7 +5589,7 @@
                 </a:solidFill>
                 <a:latin typeface="Arial"/>
               </a:rPr>
-              <a:t>Открытый расчёт под конкретный «СКАУТ», погрешность, измеренная на реальных спутниках, и честное «не найдено решения».</a:t>
+              <a:t>Открытый расчёт под конкретный «СКАУТ», погрешность модели дрейфа, измеренная на реальных спутниках, и честное «не найдено решения».</a:t>
             </a:r>
           </a:p>
         </p:txBody>
@@ -8231,7 +8231,7 @@
                 </a:solidFill>
                 <a:latin typeface="Arial"/>
               </a:rPr>
-              <a:t>Реальный клиент</a:t>
+              <a:t>Реальный случай</a:t>
             </a:r>
           </a:p>
         </p:txBody>
@@ -8411,7 +8411,7 @@
                 </a:solidFill>
                 <a:latin typeface="Arial"/>
               </a:rPr>
-              <a:t>ISRO к 2030 году требует уводить с орбиты больше 99 % отработавших аппаратов (Debris Free Space Missions). В июне 2026 года главы космических агентств БРИКС в Бенгалуру обсуждали «debris-free mission management». «СКАУТ» продаётся и для увода, ДРЕЙФ считает и эту миссию.</a:t>
+              <a:t>ISRO ставит цель к 2030 году: миссии без мусора, увод после работы с успехом больше 99 % (Debris Free Space Missions). В июне 2026 года главы космических агентств БРИКС в Бенгалуру обсуждали «debris-free mission management». «СКАУТ» продаётся и для увода, ДРЕЙФ считает и эту миссию.</a:t>
             </a:r>
           </a:p>
         </p:txBody>
@@ -8818,7 +8818,7 @@
                 </a:solidFill>
                 <a:latin typeface="Arial"/>
               </a:rPr>
-              <a:t>Открытая модель, которую операторы стран БРИКС перепроверяют сами. Совместный расчёт развоза по заявкам нескольких стран с одного запуска. Совместная проверка на данных своих спутников. Развитие в стажировке А-РОКЕТС к пилотному полёту буксира в 2028 году.</a:t>
+              <a:t>Открытая модель, которую операторы стран БРИКС перепроверяют сами. Совместный расчёт развоза по заявкам нескольких стран с одного запуска. Совместная проверка на данных своих спутников. Развитие в стажировке А-РОКЕТС к испытаниям буксира, намеченным к 2028 году.</a:t>
             </a:r>
           </a:p>
         </p:txBody>

--- a/out/slides/DREIF_portfolio.pptx
+++ b/out/slides/DREIF_portfolio.pptx
@@ -4430,7 +4430,16 @@
                 </a:solidFill>
                 <a:latin typeface="Arial"/>
               </a:rPr>
-              <a:t>Данные буксира: a-rockets.com · расчёт: work/calc/strategy_map.py</a:t>
+              <a:t>Данные буксира: a-rockets.com · расчёт: work/calc/strategy_map.py · калькулятор: </a:t>
+            </a:r>
+            <a:r>
+              <a:rPr sz="900" b="0" lang="ru-RU" spc="0">
+                <a:solidFill>
+                  <a:srgbClr val="5B6370"/>
+                </a:solidFill>
+                <a:latin typeface="Arial"/>
+              </a:rPr>
+              <a:t>andrew-ug.github.io/brics-ideathon-2026</a:t>
             </a:r>
           </a:p>
         </p:txBody>
@@ -7980,7 +7989,34 @@
                 </a:solidFill>
                 <a:latin typeface="Arial"/>
               </a:rPr>
-              <a:t>ДРЕЙФ · кейс 3</a:t>
+              <a:t>Живой калькулятор: </a:t>
+            </a:r>
+            <a:r>
+              <a:rPr sz="900" b="0" lang="ru-RU" spc="0">
+                <a:solidFill>
+                  <a:srgbClr val="5B6370"/>
+                </a:solidFill>
+                <a:latin typeface="Arial"/>
+              </a:rPr>
+              <a:t>andrew-ug.github.io/brics-ideathon-2026</a:t>
+            </a:r>
+            <a:r>
+              <a:rPr sz="900" b="0" lang="ru-RU" spc="0">
+                <a:solidFill>
+                  <a:srgbClr val="5B6370"/>
+                </a:solidFill>
+                <a:latin typeface="Arial"/>
+              </a:rPr>
+              <a:t> · код и данные: </a:t>
+            </a:r>
+            <a:r>
+              <a:rPr sz="900" b="0" lang="ru-RU" spc="0">
+                <a:solidFill>
+                  <a:srgbClr val="5B6370"/>
+                </a:solidFill>
+                <a:latin typeface="Arial"/>
+              </a:rPr>
+              <a:t>github.com/andrew-ug/brics-ideathon-2026</a:t>
             </a:r>
           </a:p>
         </p:txBody>
